--- a/dist/초5/사회·역사/권리와생활/초5_사회·역사_권리와생활_01_인권_학생용.pptx
+++ b/dist/초5/사회·역사/권리와생활/초5_사회·역사_권리와생활_01_인권_학생용.pptx
@@ -119,20 +119,20 @@
   <p:extLst>
     <p:ext uri="{521415D9-36F7-43E2-AB2F-B90AF26B5E84}">
       <p14:sectionLst xmlns:p14="http://schemas.microsoft.com/office/powerpoint/2010/main">
-        <p14:section name="도입" id="{95f5feb6-f5a1-39ec-d19c-0c2c0f89e658}">
+        <p14:section name="도입" id="{6e1dc7b4-bfb7-469c-51d8-cddef13a0a8a}">
           <p14:sldIdLst>
             <p14:sldId id="256"/>
             <p14:sldId id="257"/>
           </p14:sldIdLst>
         </p14:section>
-        <p14:section name="개념" id="{f0695f31-bb39-2be3-f338-c0af06658326}">
+        <p14:section name="개념" id="{588cd9dc-9851-8d84-2838-b7a84c1a0508}">
           <p14:sldIdLst>
             <p14:sldId id="258"/>
             <p14:sldId id="259"/>
             <p14:sldId id="262"/>
           </p14:sldIdLst>
         </p14:section>
-        <p14:section name="연습" id="{99cf1323-481a-43cb-b4ea-9f85cad3386a}">
+        <p14:section name="연습" id="{56a06bf4-f52d-35b7-230b-35a4ad0c6476}">
           <p14:sldIdLst>
             <p14:sldId id="260"/>
             <p14:sldId id="261"/>
@@ -140,24 +140,24 @@
             <p14:sldId id="264"/>
           </p14:sldIdLst>
         </p14:section>
-        <p14:section name="개념" id="{5cd3d4d6-c69c-bc27-1de1-4c973d0cabe3}">
+        <p14:section name="개념" id="{b99801df-f6e4-e56c-f091-e9e0e574828c}">
           <p14:sldIdLst/>
         </p14:section>
-        <p14:section name="연습" id="{457b1655-bebd-a7d1-2be0-2ff0b243607f}">
+        <p14:section name="연습" id="{bf131c4a-c0e8-0130-235f-6495b39d3868}">
           <p14:sldIdLst/>
         </p14:section>
-        <p14:section name="확인" id="{8cfc06c4-7672-40ae-849c-446be78b13b2}">
+        <p14:section name="확인" id="{fa765e75-c039-f5d9-67e4-cf7c7bfb0b3e}">
           <p14:sldIdLst>
             <p14:sldId id="265"/>
             <p14:sldId id="266"/>
           </p14:sldIdLst>
         </p14:section>
-        <p14:section name="정리" id="{7b440f69-4a40-2fdf-e778-6e964d7d34ae}">
+        <p14:section name="정리" id="{09e73c3d-e6d4-6276-5fdd-bb35883bfff3}">
           <p14:sldIdLst>
             <p14:sldId id="267"/>
           </p14:sldIdLst>
         </p14:section>
-        <p14:section name="보충" id="{021e340b-02de-5e8d-8c20-7603917299a4}">
+        <p14:section name="보충" id="{645351db-7687-1f84-ff85-f66230fac282}">
           <p14:sldIdLst>
             <p14:sldId id="268"/>
           </p14:sldIdLst>
